--- a/Presentation AEGIS PROJECT 0.pptx
+++ b/Presentation AEGIS PROJECT 0.pptx
@@ -5,20 +5,21 @@
     <p:sldMasterId id="2147483648" r:id="rId4"/>
   </p:sldMasterIdLst>
   <p:notesMasterIdLst>
-    <p:notesMasterId r:id="rId13"/>
+    <p:notesMasterId r:id="rId14"/>
   </p:notesMasterIdLst>
   <p:handoutMasterIdLst>
-    <p:handoutMasterId r:id="rId14"/>
+    <p:handoutMasterId r:id="rId15"/>
   </p:handoutMasterIdLst>
   <p:sldIdLst>
     <p:sldId id="282" r:id="rId5"/>
     <p:sldId id="292" r:id="rId6"/>
     <p:sldId id="293" r:id="rId7"/>
-    <p:sldId id="291" r:id="rId8"/>
-    <p:sldId id="283" r:id="rId9"/>
-    <p:sldId id="284" r:id="rId10"/>
-    <p:sldId id="296" r:id="rId11"/>
-    <p:sldId id="297" r:id="rId12"/>
+    <p:sldId id="298" r:id="rId8"/>
+    <p:sldId id="291" r:id="rId9"/>
+    <p:sldId id="283" r:id="rId10"/>
+    <p:sldId id="284" r:id="rId11"/>
+    <p:sldId id="296" r:id="rId12"/>
+    <p:sldId id="297" r:id="rId13"/>
   </p:sldIdLst>
   <p:sldSz cx="12192000" cy="6858000"/>
   <p:notesSz cx="6858000" cy="9144000"/>
@@ -224,7 +225,7 @@
             <a:pPr rtl="0"/>
             <a:fld id="{615FAA28-D333-4D57-AF0E-BDF53B4498B2}" type="datetime1">
               <a:rPr lang="en-GB" smtClean="0"/>
-              <a:t>09/07/2026</a:t>
+              <a:t>10/07/2026</a:t>
             </a:fld>
             <a:endParaRPr lang="en-GB"/>
           </a:p>
@@ -406,7 +407,7 @@
             <a:pPr rtl="0"/>
             <a:fld id="{6D03277C-3F5C-4673-8D79-1738A329ED93}" type="datetime1">
               <a:rPr lang="en-GB" noProof="0" smtClean="0"/>
-              <a:t>09/07/2026</a:t>
+              <a:t>10/07/2026</a:t>
             </a:fld>
             <a:endParaRPr lang="en-GB" noProof="0"/>
           </a:p>
@@ -1002,7 +1003,7 @@
             <a:pPr rtl="0"/>
             <a:fld id="{8530193B-564F-4854-8A52-728F3FB19C85}" type="slidenum">
               <a:rPr lang="en-GB" smtClean="0"/>
-              <a:t>4</a:t>
+              <a:t>5</a:t>
             </a:fld>
             <a:endParaRPr lang="en-GB"/>
           </a:p>
@@ -1088,7 +1089,7 @@
             <a:pPr rtl="0"/>
             <a:fld id="{8530193B-564F-4854-8A52-728F3FB19C85}" type="slidenum">
               <a:rPr lang="en-GB" smtClean="0"/>
-              <a:t>5</a:t>
+              <a:t>6</a:t>
             </a:fld>
             <a:endParaRPr lang="en-GB"/>
           </a:p>
@@ -1174,7 +1175,7 @@
             <a:pPr rtl="0"/>
             <a:fld id="{8530193B-564F-4854-8A52-728F3FB19C85}" type="slidenum">
               <a:rPr lang="en-GB" smtClean="0"/>
-              <a:t>6</a:t>
+              <a:t>7</a:t>
             </a:fld>
             <a:endParaRPr lang="en-GB"/>
           </a:p>
@@ -1260,7 +1261,7 @@
             <a:pPr rtl="0"/>
             <a:fld id="{8530193B-564F-4854-8A52-728F3FB19C85}" type="slidenum">
               <a:rPr lang="en-GB" smtClean="0"/>
-              <a:t>7</a:t>
+              <a:t>8</a:t>
             </a:fld>
             <a:endParaRPr lang="en-GB"/>
           </a:p>
@@ -8828,7 +8829,7 @@
             <a:pPr rtl="0"/>
             <a:r>
               <a:rPr lang="fr-FR" sz="3000" dirty="0"/>
-              <a:t>1- Contextualisation </a:t>
+              <a:t>1- Introduction  </a:t>
             </a:r>
           </a:p>
           <a:p>
@@ -9029,8 +9030,12 @@
           <a:lstStyle/>
           <a:p>
             <a:r>
+              <a:rPr lang="fr-FR" dirty="0" err="1"/>
+              <a:t>InTRODUCTION</a:t>
+            </a:r>
+            <a:r>
               <a:rPr lang="fr-FR" dirty="0"/>
-              <a:t>Contextualisation</a:t>
+              <a:t> </a:t>
             </a:r>
             <a:endParaRPr lang="en-GB" dirty="0"/>
           </a:p>
@@ -9258,10 +9263,10 @@
       </p:grpSpPr>
       <p:pic>
         <p:nvPicPr>
-          <p:cNvPr id="7" name="Picture 6" descr="Dark, Hacker and Portrait of Man with Laptop for Online Fraud,  Cybersecurity Threat and Data Breach. Studio, Thief and Stock Image - Image  of tech, portrait: 444420649">
-            <a:extLst>
-              <a:ext uri="{FF2B5EF4-FFF2-40B4-BE49-F238E27FC236}">
-                <a16:creationId xmlns:a16="http://schemas.microsoft.com/office/drawing/2014/main" id="{10FC94A6-F9FB-2663-2287-7EC09ADA72F1}"/>
+          <p:cNvPr id="6" name="Picture 5">
+            <a:extLst>
+              <a:ext uri="{FF2B5EF4-FFF2-40B4-BE49-F238E27FC236}">
+                <a16:creationId xmlns:a16="http://schemas.microsoft.com/office/drawing/2014/main" id="{9001C223-0904-DC44-637C-E78EBF9D5ADA}"/>
               </a:ext>
             </a:extLst>
           </p:cNvPr>
@@ -9271,225 +9276,25 @@
           <p:nvPr/>
         </p:nvPicPr>
         <p:blipFill>
-          <a:blip r:embed="rId3"/>
-          <a:srcRect l="21568" r="21964"/>
+          <a:blip r:embed="rId2"/>
           <a:stretch>
             <a:fillRect/>
           </a:stretch>
         </p:blipFill>
         <p:spPr>
           <a:xfrm>
-            <a:off x="9980476" y="10"/>
-            <a:ext cx="2211524" cy="6857990"/>
+            <a:off x="0" y="168250"/>
+            <a:ext cx="12242243" cy="6689750"/>
           </a:xfrm>
           <a:prstGeom prst="rect">
             <a:avLst/>
           </a:prstGeom>
-          <a:noFill/>
         </p:spPr>
       </p:pic>
-      <p:sp>
-        <p:nvSpPr>
-          <p:cNvPr id="2" name="Title 1">
-            <a:extLst>
-              <a:ext uri="{FF2B5EF4-FFF2-40B4-BE49-F238E27FC236}">
-                <a16:creationId xmlns:a16="http://schemas.microsoft.com/office/drawing/2014/main" id="{AEA5083B-CC27-4F1C-AD03-E3DBEC1C9E78}"/>
-              </a:ext>
-            </a:extLst>
-          </p:cNvPr>
-          <p:cNvSpPr>
-            <a:spLocks noGrp="1"/>
-          </p:cNvSpPr>
-          <p:nvPr>
-            <p:ph type="title"/>
-          </p:nvPr>
-        </p:nvSpPr>
-        <p:spPr>
-          <a:xfrm>
-            <a:off x="4445086" y="1807950"/>
-            <a:ext cx="5184913" cy="432000"/>
-          </a:xfrm>
-        </p:spPr>
-        <p:txBody>
-          <a:bodyPr rtlCol="0" anchor="ctr">
-            <a:normAutofit fontScale="90000"/>
-          </a:bodyPr>
-          <a:lstStyle/>
-          <a:p>
-            <a:r>
-              <a:rPr lang="fr-FR" sz="3000" dirty="0"/>
-              <a:t>D</a:t>
-            </a:r>
-            <a:r>
-              <a:rPr lang="en-GB" sz="3000" dirty="0"/>
-              <a:t>EPLOIEMENT D’UNE INFRASTRUCTUR PROPRE</a:t>
-            </a:r>
-          </a:p>
-        </p:txBody>
-      </p:sp>
-      <p:sp>
-        <p:nvSpPr>
-          <p:cNvPr id="4" name="Content Placeholder 3">
-            <a:extLst>
-              <a:ext uri="{FF2B5EF4-FFF2-40B4-BE49-F238E27FC236}">
-                <a16:creationId xmlns:a16="http://schemas.microsoft.com/office/drawing/2014/main" id="{125E40B9-054F-4D79-BD17-68E71C740D01}"/>
-              </a:ext>
-            </a:extLst>
-          </p:cNvPr>
-          <p:cNvSpPr>
-            <a:spLocks noGrp="1"/>
-          </p:cNvSpPr>
-          <p:nvPr>
-            <p:ph sz="half" idx="1"/>
-          </p:nvPr>
-        </p:nvSpPr>
-        <p:spPr>
-          <a:xfrm>
-            <a:off x="4445000" y="2908300"/>
-            <a:ext cx="5184800" cy="3283700"/>
-          </a:xfrm>
-        </p:spPr>
-        <p:txBody>
-          <a:bodyPr rtlCol="0">
-            <a:normAutofit/>
-          </a:bodyPr>
-          <a:lstStyle/>
-          <a:p>
-            <a:r>
-              <a:rPr lang="en-GB" dirty="0" err="1"/>
-              <a:t>Remplacement</a:t>
-            </a:r>
-            <a:r>
-              <a:rPr lang="en-GB" dirty="0"/>
-              <a:t> du </a:t>
-            </a:r>
-            <a:r>
-              <a:rPr lang="en-GB" dirty="0" err="1"/>
-              <a:t>serveur</a:t>
-            </a:r>
-            <a:r>
-              <a:rPr lang="en-GB" dirty="0"/>
-              <a:t> </a:t>
-            </a:r>
-            <a:r>
-              <a:rPr lang="en-GB" dirty="0" err="1"/>
-              <a:t>compromis</a:t>
-            </a:r>
-            <a:endParaRPr lang="en-GB" dirty="0"/>
-          </a:p>
-          <a:p>
-            <a:r>
-              <a:rPr lang="en-GB" dirty="0"/>
-              <a:t>Nouvelle machine </a:t>
-            </a:r>
-            <a:r>
-              <a:rPr lang="en-GB" dirty="0" err="1"/>
-              <a:t>virtuelle</a:t>
-            </a:r>
-            <a:r>
-              <a:rPr lang="en-GB" dirty="0"/>
-              <a:t> Linux (Debian)</a:t>
-            </a:r>
-          </a:p>
-          <a:p>
-            <a:r>
-              <a:rPr lang="en-GB" dirty="0"/>
-              <a:t>Reconstruction sur </a:t>
-            </a:r>
-            <a:r>
-              <a:rPr lang="en-GB" dirty="0" err="1"/>
-              <a:t>une</a:t>
-            </a:r>
-            <a:r>
-              <a:rPr lang="en-GB" dirty="0"/>
-              <a:t> base saine</a:t>
-            </a:r>
-          </a:p>
-          <a:p>
-            <a:r>
-              <a:rPr lang="en-GB" dirty="0"/>
-              <a:t>Suppression des </a:t>
-            </a:r>
-            <a:r>
-              <a:rPr lang="en-GB" dirty="0" err="1"/>
-              <a:t>risques</a:t>
-            </a:r>
-            <a:r>
-              <a:rPr lang="en-GB" dirty="0"/>
-              <a:t> </a:t>
-            </a:r>
-            <a:r>
-              <a:rPr lang="en-GB" dirty="0" err="1"/>
-              <a:t>liés</a:t>
-            </a:r>
-            <a:r>
-              <a:rPr lang="en-GB" dirty="0"/>
-              <a:t> à l’ancienne infrastructure</a:t>
-            </a:r>
-          </a:p>
-          <a:p>
-            <a:r>
-              <a:rPr lang="en-GB" dirty="0"/>
-              <a:t>Configuration </a:t>
-            </a:r>
-            <a:r>
-              <a:rPr lang="en-GB" dirty="0" err="1"/>
-              <a:t>sécurisée</a:t>
-            </a:r>
-            <a:r>
-              <a:rPr lang="en-GB" dirty="0"/>
-              <a:t> </a:t>
-            </a:r>
-            <a:r>
-              <a:rPr lang="en-GB" dirty="0" err="1"/>
-              <a:t>dès</a:t>
-            </a:r>
-            <a:r>
-              <a:rPr lang="en-GB" dirty="0"/>
-              <a:t> le </a:t>
-            </a:r>
-            <a:r>
-              <a:rPr lang="en-GB" dirty="0" err="1"/>
-              <a:t>départ</a:t>
-            </a:r>
-            <a:endParaRPr lang="en-GB" dirty="0"/>
-          </a:p>
-          <a:p>
-            <a:r>
-              <a:rPr lang="en-GB" dirty="0"/>
-              <a:t>Objectif : </a:t>
-            </a:r>
-            <a:r>
-              <a:rPr lang="en-GB" dirty="0" err="1"/>
-              <a:t>repartir</a:t>
-            </a:r>
-            <a:r>
-              <a:rPr lang="en-GB" dirty="0"/>
-              <a:t> avec un </a:t>
-            </a:r>
-            <a:r>
-              <a:rPr lang="en-GB" dirty="0" err="1"/>
-              <a:t>environnement</a:t>
-            </a:r>
-            <a:r>
-              <a:rPr lang="en-GB" dirty="0"/>
-              <a:t> </a:t>
-            </a:r>
-            <a:r>
-              <a:rPr lang="en-GB" dirty="0" err="1"/>
-              <a:t>fiable</a:t>
-            </a:r>
-            <a:r>
-              <a:rPr lang="en-GB" dirty="0"/>
-              <a:t> et protégé</a:t>
-            </a:r>
-          </a:p>
-        </p:txBody>
-      </p:sp>
     </p:spTree>
     <p:extLst>
       <p:ext uri="{BB962C8B-B14F-4D97-AF65-F5344CB8AC3E}">
-        <p14:creationId xmlns:p14="http://schemas.microsoft.com/office/powerpoint/2010/main" val="3640701659"/>
+        <p14:creationId xmlns:p14="http://schemas.microsoft.com/office/powerpoint/2010/main" val="4242824059"/>
       </p:ext>
     </p:extLst>
   </p:cSld>
@@ -9516,95 +9321,12 @@
           <a:chExt cx="0" cy="0"/>
         </a:xfrm>
       </p:grpSpPr>
-      <p:sp>
-        <p:nvSpPr>
-          <p:cNvPr id="2" name="Title 1">
-            <a:extLst>
-              <a:ext uri="{FF2B5EF4-FFF2-40B4-BE49-F238E27FC236}">
-                <a16:creationId xmlns:a16="http://schemas.microsoft.com/office/drawing/2014/main" id="{3560F281-4FF6-4617-A809-AC9C15ECF18A}"/>
-              </a:ext>
-            </a:extLst>
-          </p:cNvPr>
-          <p:cNvSpPr>
-            <a:spLocks noGrp="1"/>
-          </p:cNvSpPr>
-          <p:nvPr>
-            <p:ph type="title"/>
-          </p:nvPr>
-        </p:nvSpPr>
-        <p:spPr>
-          <a:xfrm>
-            <a:off x="432000" y="432000"/>
-            <a:ext cx="9198000" cy="432000"/>
-          </a:xfrm>
-        </p:spPr>
-        <p:txBody>
-          <a:bodyPr rtlCol="0" anchor="ctr">
-            <a:normAutofit/>
-          </a:bodyPr>
-          <a:lstStyle/>
-          <a:p>
-            <a:pPr rtl="0"/>
-            <a:r>
-              <a:rPr lang="fr-FR" sz="3000" dirty="0"/>
-              <a:t>D</a:t>
-            </a:r>
-            <a:r>
-              <a:rPr lang="en-GB" sz="3000" dirty="0"/>
-              <a:t>EPLOIEMENT D’UNE INFRASTRUCTUR PROPRE</a:t>
-            </a:r>
-          </a:p>
-        </p:txBody>
-      </p:sp>
-      <p:sp>
-        <p:nvSpPr>
-          <p:cNvPr id="13" name="Text Placeholder 4">
-            <a:extLst>
-              <a:ext uri="{FF2B5EF4-FFF2-40B4-BE49-F238E27FC236}">
-                <a16:creationId xmlns:a16="http://schemas.microsoft.com/office/drawing/2014/main" id="{2E9BA3A0-057F-A836-F0E1-058D6FFE7E6C}"/>
-              </a:ext>
-            </a:extLst>
-          </p:cNvPr>
-          <p:cNvSpPr>
-            <a:spLocks noGrp="1"/>
-          </p:cNvSpPr>
-          <p:nvPr>
-            <p:ph type="body" sz="quarter" idx="3"/>
-          </p:nvPr>
-        </p:nvSpPr>
-        <p:spPr>
-          <a:xfrm>
-            <a:off x="432000" y="1272840"/>
-            <a:ext cx="4434840" cy="823912"/>
-          </a:xfrm>
-        </p:spPr>
-        <p:txBody>
-          <a:bodyPr/>
-          <a:lstStyle/>
-          <a:p>
-            <a:pPr algn="ctr"/>
-            <a:r>
-              <a:rPr lang="en-GB" dirty="0" err="1"/>
-              <a:t>Durcissement</a:t>
-            </a:r>
-            <a:r>
-              <a:rPr lang="en-US" dirty="0"/>
-              <a:t> du </a:t>
-            </a:r>
-            <a:r>
-              <a:rPr lang="en-US" dirty="0" err="1"/>
-              <a:t>système</a:t>
-            </a:r>
-            <a:endParaRPr lang="en-US" dirty="0"/>
-          </a:p>
-        </p:txBody>
-      </p:sp>
       <p:pic>
         <p:nvPicPr>
-          <p:cNvPr id="8" name="Picture 7" descr="Understanding the Mind of a Hacker - Cyber Security">
-            <a:extLst>
-              <a:ext uri="{FF2B5EF4-FFF2-40B4-BE49-F238E27FC236}">
-                <a16:creationId xmlns:a16="http://schemas.microsoft.com/office/drawing/2014/main" id="{31C0E114-90E0-8672-F6E3-87EC556D6FB3}"/>
+          <p:cNvPr id="7" name="Picture 6" descr="Dark, Hacker and Portrait of Man with Laptop for Online Fraud,  Cybersecurity Threat and Data Breach. Studio, Thief and Stock Image - Image  of tech, portrait: 444420649">
+            <a:extLst>
+              <a:ext uri="{FF2B5EF4-FFF2-40B4-BE49-F238E27FC236}">
+                <a16:creationId xmlns:a16="http://schemas.microsoft.com/office/drawing/2014/main" id="{10FC94A6-F9FB-2663-2287-7EC09ADA72F1}"/>
               </a:ext>
             </a:extLst>
           </p:cNvPr>
@@ -9615,15 +9337,15 @@
         </p:nvPicPr>
         <p:blipFill>
           <a:blip r:embed="rId3"/>
-          <a:srcRect l="27424" r="31402"/>
+          <a:srcRect l="21568" r="21964"/>
           <a:stretch>
             <a:fillRect/>
           </a:stretch>
         </p:blipFill>
         <p:spPr>
           <a:xfrm>
-            <a:off x="9990667" y="-51913"/>
-            <a:ext cx="2201334" cy="6909913"/>
+            <a:off x="9980476" y="10"/>
+            <a:ext cx="2211524" cy="6857990"/>
           </a:xfrm>
           <a:prstGeom prst="rect">
             <a:avLst/>
@@ -9633,24 +9355,63 @@
       </p:pic>
       <p:sp>
         <p:nvSpPr>
+          <p:cNvPr id="2" name="Title 1">
+            <a:extLst>
+              <a:ext uri="{FF2B5EF4-FFF2-40B4-BE49-F238E27FC236}">
+                <a16:creationId xmlns:a16="http://schemas.microsoft.com/office/drawing/2014/main" id="{AEA5083B-CC27-4F1C-AD03-E3DBEC1C9E78}"/>
+              </a:ext>
+            </a:extLst>
+          </p:cNvPr>
+          <p:cNvSpPr>
+            <a:spLocks noGrp="1"/>
+          </p:cNvSpPr>
+          <p:nvPr>
+            <p:ph type="title"/>
+          </p:nvPr>
+        </p:nvSpPr>
+        <p:spPr>
+          <a:xfrm>
+            <a:off x="4445086" y="1807950"/>
+            <a:ext cx="5184913" cy="432000"/>
+          </a:xfrm>
+        </p:spPr>
+        <p:txBody>
+          <a:bodyPr rtlCol="0" anchor="ctr">
+            <a:normAutofit fontScale="90000"/>
+          </a:bodyPr>
+          <a:lstStyle/>
+          <a:p>
+            <a:r>
+              <a:rPr lang="fr-FR" sz="3000" dirty="0"/>
+              <a:t>D</a:t>
+            </a:r>
+            <a:r>
+              <a:rPr lang="en-GB" sz="3000" dirty="0"/>
+              <a:t>EPLOIEMENT D’UNE INFRASTRUCTUR PROPRE</a:t>
+            </a:r>
+          </a:p>
+        </p:txBody>
+      </p:sp>
+      <p:sp>
+        <p:nvSpPr>
           <p:cNvPr id="4" name="Content Placeholder 3">
             <a:extLst>
               <a:ext uri="{FF2B5EF4-FFF2-40B4-BE49-F238E27FC236}">
-                <a16:creationId xmlns:a16="http://schemas.microsoft.com/office/drawing/2014/main" id="{D355C61F-C8F1-4977-8E1F-F16C0D9EA88C}"/>
-              </a:ext>
-            </a:extLst>
-          </p:cNvPr>
-          <p:cNvSpPr>
-            <a:spLocks noGrp="1"/>
-          </p:cNvSpPr>
-          <p:nvPr>
-            <p:ph sz="quarter" idx="4"/>
+                <a16:creationId xmlns:a16="http://schemas.microsoft.com/office/drawing/2014/main" id="{125E40B9-054F-4D79-BD17-68E71C740D01}"/>
+              </a:ext>
+            </a:extLst>
+          </p:cNvPr>
+          <p:cNvSpPr>
+            <a:spLocks noGrp="1"/>
+          </p:cNvSpPr>
+          <p:nvPr>
+            <p:ph sz="half" idx="1"/>
           </p:nvPr>
         </p:nvSpPr>
         <p:spPr>
           <a:xfrm>
-            <a:off x="2813580" y="2333089"/>
-            <a:ext cx="4434840" cy="4092911"/>
+            <a:off x="4445000" y="2908300"/>
+            <a:ext cx="5184800" cy="3283700"/>
           </a:xfrm>
         </p:spPr>
         <p:txBody>
@@ -9661,15 +9422,15 @@
           <a:p>
             <a:r>
               <a:rPr lang="en-GB" dirty="0" err="1"/>
-              <a:t>Sécurisation</a:t>
+              <a:t>Remplacement</a:t>
             </a:r>
             <a:r>
               <a:rPr lang="en-GB" dirty="0"/>
-              <a:t> des </a:t>
+              <a:t> du </a:t>
             </a:r>
             <a:r>
               <a:rPr lang="en-GB" dirty="0" err="1"/>
-              <a:t>comptes</a:t>
+              <a:t>serveur</a:t>
             </a:r>
             <a:r>
               <a:rPr lang="en-GB" dirty="0"/>
@@ -9677,101 +9438,103 @@
             </a:r>
             <a:r>
               <a:rPr lang="en-GB" dirty="0" err="1"/>
-              <a:t>utilisateurs</a:t>
+              <a:t>compromis</a:t>
             </a:r>
             <a:endParaRPr lang="en-GB" dirty="0"/>
           </a:p>
           <a:p>
             <a:r>
               <a:rPr lang="en-GB" dirty="0"/>
-              <a:t>Gestion </a:t>
+              <a:t>Nouvelle machine </a:t>
             </a:r>
             <a:r>
               <a:rPr lang="en-GB" dirty="0" err="1"/>
-              <a:t>stricte</a:t>
+              <a:t>virtuelle</a:t>
             </a:r>
             <a:r>
               <a:rPr lang="en-GB" dirty="0"/>
-              <a:t> des droits </a:t>
+              <a:t> Linux (Debian)</a:t>
+            </a:r>
+          </a:p>
+          <a:p>
+            <a:r>
+              <a:rPr lang="en-GB" dirty="0"/>
+              <a:t>Reconstruction sur </a:t>
             </a:r>
             <a:r>
               <a:rPr lang="en-GB" dirty="0" err="1"/>
-              <a:t>d’accès</a:t>
-            </a:r>
-            <a:endParaRPr lang="en-GB" dirty="0"/>
-          </a:p>
-          <a:p>
+              <a:t>une</a:t>
+            </a:r>
             <a:r>
               <a:rPr lang="en-GB" dirty="0"/>
-              <a:t>Connexion SSH </a:t>
+              <a:t> base saine</a:t>
+            </a:r>
+          </a:p>
+          <a:p>
+            <a:r>
+              <a:rPr lang="en-GB" dirty="0"/>
+              <a:t>Suppression des </a:t>
+            </a:r>
+            <a:r>
+              <a:rPr lang="en-GB" dirty="0" err="1"/>
+              <a:t>risques</a:t>
+            </a:r>
+            <a:r>
+              <a:rPr lang="en-GB" dirty="0"/>
+              <a:t> </a:t>
+            </a:r>
+            <a:r>
+              <a:rPr lang="en-GB" dirty="0" err="1"/>
+              <a:t>liés</a:t>
+            </a:r>
+            <a:r>
+              <a:rPr lang="en-GB" dirty="0"/>
+              <a:t> à l’ancienne infrastructure</a:t>
+            </a:r>
+          </a:p>
+          <a:p>
+            <a:r>
+              <a:rPr lang="en-GB" dirty="0"/>
+              <a:t>Configuration </a:t>
             </a:r>
             <a:r>
               <a:rPr lang="en-GB" dirty="0" err="1"/>
               <a:t>sécurisée</a:t>
             </a:r>
-            <a:endParaRPr lang="en-GB" dirty="0"/>
-          </a:p>
-          <a:p>
-            <a:pPr lvl="1"/>
-            <a:r>
-              <a:rPr lang="en-GB" dirty="0" err="1"/>
-              <a:t>Authentification</a:t>
-            </a:r>
-            <a:r>
-              <a:rPr lang="en-GB" dirty="0"/>
-              <a:t> par </a:t>
-            </a:r>
-            <a:r>
-              <a:rPr lang="en-GB" dirty="0" err="1"/>
-              <a:t>clé</a:t>
-            </a:r>
             <a:r>
               <a:rPr lang="en-GB" dirty="0"/>
               <a:t> </a:t>
             </a:r>
             <a:r>
               <a:rPr lang="en-GB" dirty="0" err="1"/>
-              <a:t>uniquement</a:t>
+              <a:t>dès</a:t>
+            </a:r>
+            <a:r>
+              <a:rPr lang="en-GB" dirty="0"/>
+              <a:t> le </a:t>
+            </a:r>
+            <a:r>
+              <a:rPr lang="en-GB" dirty="0" err="1"/>
+              <a:t>départ</a:t>
             </a:r>
             <a:endParaRPr lang="en-GB" dirty="0"/>
           </a:p>
           <a:p>
-            <a:pPr lvl="1"/>
+            <a:r>
+              <a:rPr lang="en-GB" dirty="0"/>
+              <a:t>Objectif : </a:t>
+            </a:r>
             <a:r>
               <a:rPr lang="en-GB" dirty="0" err="1"/>
-              <a:t>Désactivation</a:t>
+              <a:t>repartir</a:t>
             </a:r>
             <a:r>
               <a:rPr lang="en-GB" dirty="0"/>
-              <a:t> du compte root</a:t>
-            </a:r>
-          </a:p>
-          <a:p>
-            <a:pPr lvl="1"/>
-            <a:r>
-              <a:rPr lang="en-GB" dirty="0"/>
-              <a:t>Interdiction des connexions par mot de passe</a:t>
-            </a:r>
-          </a:p>
-          <a:p>
-            <a:r>
-              <a:rPr lang="en-GB" dirty="0"/>
-              <a:t>Configuration du pare-feu avec UFW</a:t>
-            </a:r>
-          </a:p>
-          <a:p>
-            <a:pPr lvl="1"/>
+              <a:t> avec un </a:t>
+            </a:r>
             <a:r>
               <a:rPr lang="en-GB" dirty="0" err="1"/>
-              <a:t>Autorisation</a:t>
-            </a:r>
-            <a:r>
-              <a:rPr lang="en-GB" dirty="0"/>
-              <a:t> des services </a:t>
-            </a:r>
-            <a:r>
-              <a:rPr lang="en-GB" dirty="0" err="1"/>
-              <a:t>nécessaires</a:t>
+              <a:t>environnement</a:t>
             </a:r>
             <a:r>
               <a:rPr lang="en-GB" dirty="0"/>
@@ -9779,72 +9542,19 @@
             </a:r>
             <a:r>
               <a:rPr lang="en-GB" dirty="0" err="1"/>
-              <a:t>uniquement</a:t>
-            </a:r>
-            <a:endParaRPr lang="en-GB" dirty="0"/>
-          </a:p>
-          <a:p>
-            <a:r>
-              <a:rPr lang="en-GB" dirty="0" err="1"/>
-              <a:t>Désactivation</a:t>
+              <a:t>fiable</a:t>
             </a:r>
             <a:r>
               <a:rPr lang="en-GB" dirty="0"/>
-              <a:t> des services </a:t>
-            </a:r>
-            <a:r>
-              <a:rPr lang="en-GB" dirty="0" err="1"/>
-              <a:t>inutiles</a:t>
-            </a:r>
-            <a:endParaRPr lang="en-GB" dirty="0"/>
-          </a:p>
-          <a:p>
-            <a:r>
-              <a:rPr lang="en-GB" dirty="0"/>
-              <a:t>Fail2ban anti brut force</a:t>
-            </a:r>
-          </a:p>
-          <a:p>
-            <a:r>
-              <a:rPr lang="en-GB" dirty="0"/>
-              <a:t>Objectif : </a:t>
-            </a:r>
-            <a:r>
-              <a:rPr lang="en-GB" dirty="0" err="1"/>
-              <a:t>réduire</a:t>
-            </a:r>
-            <a:r>
-              <a:rPr lang="en-GB" dirty="0"/>
-              <a:t> les </a:t>
-            </a:r>
-            <a:r>
-              <a:rPr lang="en-GB" dirty="0" err="1"/>
-              <a:t>risques</a:t>
-            </a:r>
-            <a:r>
-              <a:rPr lang="en-GB" dirty="0"/>
-              <a:t> et </a:t>
-            </a:r>
-            <a:r>
-              <a:rPr lang="en-GB" dirty="0" err="1"/>
-              <a:t>renforcer</a:t>
-            </a:r>
-            <a:r>
-              <a:rPr lang="en-GB" dirty="0"/>
-              <a:t> la sécurité du </a:t>
-            </a:r>
-            <a:r>
-              <a:rPr lang="en-GB" dirty="0" err="1"/>
-              <a:t>serveur</a:t>
-            </a:r>
-            <a:endParaRPr lang="en-GB" dirty="0"/>
+              <a:t> et protégé</a:t>
+            </a:r>
           </a:p>
         </p:txBody>
       </p:sp>
     </p:spTree>
     <p:extLst>
       <p:ext uri="{BB962C8B-B14F-4D97-AF65-F5344CB8AC3E}">
-        <p14:creationId xmlns:p14="http://schemas.microsoft.com/office/powerpoint/2010/main" val="1329746698"/>
+        <p14:creationId xmlns:p14="http://schemas.microsoft.com/office/powerpoint/2010/main" val="3640701659"/>
       </p:ext>
     </p:extLst>
   </p:cSld>
@@ -9873,10 +9583,10 @@
       </p:grpSpPr>
       <p:pic>
         <p:nvPicPr>
-          <p:cNvPr id="9" name="Picture 8" descr="Top 5 Most Notorious Computer Hackers - TechEBlog">
-            <a:extLst>
-              <a:ext uri="{FF2B5EF4-FFF2-40B4-BE49-F238E27FC236}">
-                <a16:creationId xmlns:a16="http://schemas.microsoft.com/office/drawing/2014/main" id="{17F4F9DA-8794-924F-8E32-792B70B5B3F5}"/>
+          <p:cNvPr id="8" name="Picture 7" descr="Understanding the Mind of a Hacker - Cyber Security">
+            <a:extLst>
+              <a:ext uri="{FF2B5EF4-FFF2-40B4-BE49-F238E27FC236}">
+                <a16:creationId xmlns:a16="http://schemas.microsoft.com/office/drawing/2014/main" id="{31C0E114-90E0-8672-F6E3-87EC556D6FB3}"/>
               </a:ext>
             </a:extLst>
           </p:cNvPr>
@@ -9887,26 +9597,238 @@
         </p:nvPicPr>
         <p:blipFill>
           <a:blip r:embed="rId3"/>
+          <a:srcRect l="27424" r="31402"/>
           <a:stretch>
             <a:fillRect/>
           </a:stretch>
         </p:blipFill>
         <p:spPr>
           <a:xfrm>
-            <a:off x="9989636" y="-19364"/>
-            <a:ext cx="2202363" cy="6877364"/>
+            <a:off x="9990667" y="-51913"/>
+            <a:ext cx="2201334" cy="6909913"/>
           </a:xfrm>
           <a:prstGeom prst="rect">
             <a:avLst/>
           </a:prstGeom>
+          <a:noFill/>
         </p:spPr>
       </p:pic>
       <p:sp>
         <p:nvSpPr>
-          <p:cNvPr id="2" name="Title 1">
-            <a:extLst>
-              <a:ext uri="{FF2B5EF4-FFF2-40B4-BE49-F238E27FC236}">
-                <a16:creationId xmlns:a16="http://schemas.microsoft.com/office/drawing/2014/main" id="{19304E83-A4F0-49C5-BB01-F5773509A2B3}"/>
+          <p:cNvPr id="4" name="Content Placeholder 3">
+            <a:extLst>
+              <a:ext uri="{FF2B5EF4-FFF2-40B4-BE49-F238E27FC236}">
+                <a16:creationId xmlns:a16="http://schemas.microsoft.com/office/drawing/2014/main" id="{D355C61F-C8F1-4977-8E1F-F16C0D9EA88C}"/>
+              </a:ext>
+            </a:extLst>
+          </p:cNvPr>
+          <p:cNvSpPr>
+            <a:spLocks noGrp="1"/>
+          </p:cNvSpPr>
+          <p:nvPr>
+            <p:ph sz="quarter" idx="4"/>
+          </p:nvPr>
+        </p:nvSpPr>
+        <p:spPr>
+          <a:xfrm>
+            <a:off x="2813580" y="2333089"/>
+            <a:ext cx="4434840" cy="4092911"/>
+          </a:xfrm>
+        </p:spPr>
+        <p:txBody>
+          <a:bodyPr rtlCol="0">
+            <a:normAutofit/>
+          </a:bodyPr>
+          <a:lstStyle/>
+          <a:p>
+            <a:r>
+              <a:rPr lang="en-GB" dirty="0" err="1"/>
+              <a:t>Sécurisation</a:t>
+            </a:r>
+            <a:r>
+              <a:rPr lang="en-GB" dirty="0"/>
+              <a:t> des </a:t>
+            </a:r>
+            <a:r>
+              <a:rPr lang="en-GB" dirty="0" err="1"/>
+              <a:t>comptes</a:t>
+            </a:r>
+            <a:r>
+              <a:rPr lang="en-GB" dirty="0"/>
+              <a:t> </a:t>
+            </a:r>
+            <a:r>
+              <a:rPr lang="en-GB" dirty="0" err="1"/>
+              <a:t>utilisateurs</a:t>
+            </a:r>
+            <a:endParaRPr lang="en-GB" dirty="0"/>
+          </a:p>
+          <a:p>
+            <a:r>
+              <a:rPr lang="en-GB" dirty="0"/>
+              <a:t>Gestion </a:t>
+            </a:r>
+            <a:r>
+              <a:rPr lang="en-GB" dirty="0" err="1"/>
+              <a:t>stricte</a:t>
+            </a:r>
+            <a:r>
+              <a:rPr lang="en-GB" dirty="0"/>
+              <a:t> des droits </a:t>
+            </a:r>
+            <a:r>
+              <a:rPr lang="en-GB" dirty="0" err="1"/>
+              <a:t>d’accès</a:t>
+            </a:r>
+            <a:endParaRPr lang="en-GB" dirty="0"/>
+          </a:p>
+          <a:p>
+            <a:r>
+              <a:rPr lang="en-GB" dirty="0"/>
+              <a:t>Connexion SSH </a:t>
+            </a:r>
+            <a:r>
+              <a:rPr lang="en-GB" dirty="0" err="1"/>
+              <a:t>sécurisée</a:t>
+            </a:r>
+            <a:endParaRPr lang="en-GB" dirty="0"/>
+          </a:p>
+          <a:p>
+            <a:pPr lvl="1"/>
+            <a:r>
+              <a:rPr lang="en-GB" dirty="0" err="1"/>
+              <a:t>Authentification</a:t>
+            </a:r>
+            <a:r>
+              <a:rPr lang="en-GB" dirty="0"/>
+              <a:t> par </a:t>
+            </a:r>
+            <a:r>
+              <a:rPr lang="en-GB" dirty="0" err="1"/>
+              <a:t>clé</a:t>
+            </a:r>
+            <a:r>
+              <a:rPr lang="en-GB" dirty="0"/>
+              <a:t> </a:t>
+            </a:r>
+            <a:r>
+              <a:rPr lang="en-GB" dirty="0" err="1"/>
+              <a:t>uniquement</a:t>
+            </a:r>
+            <a:endParaRPr lang="en-GB" dirty="0"/>
+          </a:p>
+          <a:p>
+            <a:pPr lvl="1"/>
+            <a:r>
+              <a:rPr lang="en-GB" dirty="0" err="1"/>
+              <a:t>Désactivation</a:t>
+            </a:r>
+            <a:r>
+              <a:rPr lang="en-GB" dirty="0"/>
+              <a:t> du compte root</a:t>
+            </a:r>
+          </a:p>
+          <a:p>
+            <a:pPr lvl="1"/>
+            <a:r>
+              <a:rPr lang="en-GB" dirty="0"/>
+              <a:t>Interdiction des connexions par mot de passe</a:t>
+            </a:r>
+          </a:p>
+          <a:p>
+            <a:r>
+              <a:rPr lang="en-GB" dirty="0"/>
+              <a:t>Configuration du pare-feu avec UFW</a:t>
+            </a:r>
+          </a:p>
+          <a:p>
+            <a:pPr lvl="1"/>
+            <a:r>
+              <a:rPr lang="en-GB" dirty="0" err="1"/>
+              <a:t>Autorisation</a:t>
+            </a:r>
+            <a:r>
+              <a:rPr lang="en-GB" dirty="0"/>
+              <a:t> des services </a:t>
+            </a:r>
+            <a:r>
+              <a:rPr lang="en-GB" dirty="0" err="1"/>
+              <a:t>nécessaires</a:t>
+            </a:r>
+            <a:r>
+              <a:rPr lang="en-GB" dirty="0"/>
+              <a:t> </a:t>
+            </a:r>
+            <a:r>
+              <a:rPr lang="en-GB" dirty="0" err="1"/>
+              <a:t>uniquement</a:t>
+            </a:r>
+            <a:endParaRPr lang="en-GB" dirty="0"/>
+          </a:p>
+          <a:p>
+            <a:r>
+              <a:rPr lang="en-GB" dirty="0" err="1"/>
+              <a:t>Désactivation</a:t>
+            </a:r>
+            <a:r>
+              <a:rPr lang="en-GB" dirty="0"/>
+              <a:t> des services </a:t>
+            </a:r>
+            <a:r>
+              <a:rPr lang="en-GB" dirty="0" err="1"/>
+              <a:t>inutiles</a:t>
+            </a:r>
+            <a:endParaRPr lang="en-GB" dirty="0"/>
+          </a:p>
+          <a:p>
+            <a:r>
+              <a:rPr lang="en-GB" dirty="0"/>
+              <a:t>Fail2ban anti brut force</a:t>
+            </a:r>
+          </a:p>
+          <a:p>
+            <a:r>
+              <a:rPr lang="en-GB" dirty="0"/>
+              <a:t>Objectif : </a:t>
+            </a:r>
+            <a:r>
+              <a:rPr lang="en-GB" dirty="0" err="1"/>
+              <a:t>réduire</a:t>
+            </a:r>
+            <a:r>
+              <a:rPr lang="en-GB" dirty="0"/>
+              <a:t> les </a:t>
+            </a:r>
+            <a:r>
+              <a:rPr lang="en-GB" dirty="0" err="1"/>
+              <a:t>risques</a:t>
+            </a:r>
+            <a:r>
+              <a:rPr lang="en-GB" dirty="0"/>
+              <a:t> et </a:t>
+            </a:r>
+            <a:r>
+              <a:rPr lang="en-GB" dirty="0" err="1"/>
+              <a:t>renforcer</a:t>
+            </a:r>
+            <a:r>
+              <a:rPr lang="en-GB" dirty="0"/>
+              <a:t> la sécurité du </a:t>
+            </a:r>
+            <a:r>
+              <a:rPr lang="en-GB" dirty="0" err="1"/>
+              <a:t>serveur</a:t>
+            </a:r>
+            <a:endParaRPr lang="en-GB" dirty="0"/>
+          </a:p>
+        </p:txBody>
+      </p:sp>
+      <p:sp>
+        <p:nvSpPr>
+          <p:cNvPr id="5" name="Title 4">
+            <a:extLst>
+              <a:ext uri="{FF2B5EF4-FFF2-40B4-BE49-F238E27FC236}">
+                <a16:creationId xmlns:a16="http://schemas.microsoft.com/office/drawing/2014/main" id="{03270E50-3072-E5C6-B330-3FDDBAAABC88}"/>
               </a:ext>
             </a:extLst>
           </p:cNvPr>
@@ -9917,341 +9839,39 @@
             <p:ph type="title"/>
           </p:nvPr>
         </p:nvSpPr>
-        <p:spPr/>
-        <p:txBody>
-          <a:bodyPr rtlCol="0"/>
+        <p:spPr>
+          <a:xfrm>
+            <a:off x="350977" y="999159"/>
+            <a:ext cx="9198000" cy="432000"/>
+          </a:xfrm>
+        </p:spPr>
+        <p:txBody>
+          <a:bodyPr/>
           <a:lstStyle/>
           <a:p>
-            <a:pPr rtl="0"/>
-            <a:r>
-              <a:rPr lang="fr-FR" dirty="0"/>
-              <a:t>S</a:t>
-            </a:r>
-            <a:r>
-              <a:rPr lang="en-GB" dirty="0"/>
-              <a:t>CRIPT PYTHON</a:t>
-            </a:r>
-          </a:p>
-        </p:txBody>
-      </p:sp>
-      <p:sp>
-        <p:nvSpPr>
-          <p:cNvPr id="5" name="Content Placeholder 4">
-            <a:extLst>
-              <a:ext uri="{FF2B5EF4-FFF2-40B4-BE49-F238E27FC236}">
-                <a16:creationId xmlns:a16="http://schemas.microsoft.com/office/drawing/2014/main" id="{CEEB3BAE-C0B2-447C-B8BE-96C6BD84D658}"/>
-              </a:ext>
-            </a:extLst>
-          </p:cNvPr>
-          <p:cNvSpPr>
-            <a:spLocks noGrp="1"/>
-          </p:cNvSpPr>
-          <p:nvPr>
-            <p:ph sz="half" idx="2"/>
-          </p:nvPr>
-        </p:nvSpPr>
-        <p:spPr>
-          <a:xfrm>
-            <a:off x="432000" y="2169000"/>
-            <a:ext cx="4500000" cy="2520000"/>
-          </a:xfrm>
-        </p:spPr>
-        <p:txBody>
-          <a:bodyPr rtlCol="0"/>
-          <a:lstStyle/>
-          <a:p>
-            <a:r>
-              <a:rPr lang="en-GB" b="1" dirty="0" err="1">
-                <a:solidFill>
-                  <a:schemeClr val="tx1"/>
-                </a:solidFill>
-              </a:rPr>
-              <a:t>Détection</a:t>
-            </a:r>
-            <a:r>
-              <a:rPr lang="en-GB" b="1" dirty="0">
-                <a:solidFill>
-                  <a:schemeClr val="tx1"/>
-                </a:solidFill>
-              </a:rPr>
-              <a:t> des anomalies</a:t>
-            </a:r>
-          </a:p>
-          <a:p>
-            <a:r>
-              <a:rPr lang="en-GB" b="1" dirty="0" err="1">
-                <a:solidFill>
-                  <a:schemeClr val="tx1"/>
-                </a:solidFill>
-              </a:rPr>
-              <a:t>Génération</a:t>
-            </a:r>
-            <a:r>
-              <a:rPr lang="en-GB" b="1" dirty="0">
-                <a:solidFill>
-                  <a:schemeClr val="tx1"/>
-                </a:solidFill>
-              </a:rPr>
-              <a:t> d’un état </a:t>
-            </a:r>
-            <a:r>
-              <a:rPr lang="en-GB" b="1" dirty="0" err="1">
-                <a:solidFill>
-                  <a:schemeClr val="tx1"/>
-                </a:solidFill>
-              </a:rPr>
-              <a:t>clair</a:t>
-            </a:r>
-            <a:r>
-              <a:rPr lang="en-GB" b="1" dirty="0">
-                <a:solidFill>
-                  <a:schemeClr val="tx1"/>
-                </a:solidFill>
-              </a:rPr>
-              <a:t> : </a:t>
-            </a:r>
-            <a:r>
-              <a:rPr lang="en-GB" b="1" dirty="0" err="1">
-                <a:solidFill>
-                  <a:schemeClr val="tx1"/>
-                </a:solidFill>
-              </a:rPr>
-              <a:t>conforme</a:t>
-            </a:r>
-            <a:r>
-              <a:rPr lang="en-GB" b="1" dirty="0">
-                <a:solidFill>
-                  <a:schemeClr val="tx1"/>
-                </a:solidFill>
-              </a:rPr>
-              <a:t> / non </a:t>
-            </a:r>
-            <a:r>
-              <a:rPr lang="en-GB" b="1" dirty="0" err="1">
-                <a:solidFill>
-                  <a:schemeClr val="tx1"/>
-                </a:solidFill>
-              </a:rPr>
-              <a:t>conforme</a:t>
-            </a:r>
-            <a:endParaRPr lang="en-GB" b="1" dirty="0">
-              <a:solidFill>
-                <a:schemeClr val="tx1"/>
-              </a:solidFill>
-            </a:endParaRPr>
-          </a:p>
-          <a:p>
-            <a:r>
-              <a:rPr lang="en-GB" b="1" dirty="0">
-                <a:solidFill>
-                  <a:schemeClr val="tx1"/>
-                </a:solidFill>
-              </a:rPr>
-              <a:t>Objectif : simplifier les </a:t>
-            </a:r>
-            <a:r>
-              <a:rPr lang="en-GB" b="1" dirty="0" err="1">
-                <a:solidFill>
-                  <a:schemeClr val="tx1"/>
-                </a:solidFill>
-              </a:rPr>
-              <a:t>vérifications</a:t>
-            </a:r>
-            <a:r>
-              <a:rPr lang="en-GB" b="1" dirty="0">
-                <a:solidFill>
-                  <a:schemeClr val="tx1"/>
-                </a:solidFill>
-              </a:rPr>
-              <a:t> et </a:t>
-            </a:r>
-            <a:r>
-              <a:rPr lang="en-GB" b="1" dirty="0" err="1">
-                <a:solidFill>
-                  <a:schemeClr val="tx1"/>
-                </a:solidFill>
-              </a:rPr>
-              <a:t>éviter</a:t>
-            </a:r>
-            <a:r>
-              <a:rPr lang="en-GB" b="1" dirty="0">
-                <a:solidFill>
-                  <a:schemeClr val="tx1"/>
-                </a:solidFill>
-              </a:rPr>
-              <a:t> les </a:t>
-            </a:r>
-            <a:r>
-              <a:rPr lang="en-GB" b="1" dirty="0" err="1">
-                <a:solidFill>
-                  <a:schemeClr val="tx1"/>
-                </a:solidFill>
-              </a:rPr>
-              <a:t>contrôles</a:t>
-            </a:r>
-            <a:r>
-              <a:rPr lang="en-GB" b="1" dirty="0">
-                <a:solidFill>
-                  <a:schemeClr val="tx1"/>
-                </a:solidFill>
-              </a:rPr>
-              <a:t> </a:t>
-            </a:r>
-            <a:r>
-              <a:rPr lang="en-GB" b="1" dirty="0" err="1">
-                <a:solidFill>
-                  <a:schemeClr val="tx1"/>
-                </a:solidFill>
-              </a:rPr>
-              <a:t>manuels</a:t>
-            </a:r>
-            <a:endParaRPr lang="en-GB" b="1" dirty="0">
-              <a:solidFill>
-                <a:schemeClr val="tx1"/>
-              </a:solidFill>
-            </a:endParaRPr>
-          </a:p>
-        </p:txBody>
-      </p:sp>
-      <p:sp>
-        <p:nvSpPr>
-          <p:cNvPr id="7" name="Text Placeholder 6">
-            <a:extLst>
-              <a:ext uri="{FF2B5EF4-FFF2-40B4-BE49-F238E27FC236}">
-                <a16:creationId xmlns:a16="http://schemas.microsoft.com/office/drawing/2014/main" id="{26A87885-D672-4CF9-A78D-CFE98385B03A}"/>
-              </a:ext>
-            </a:extLst>
-          </p:cNvPr>
-          <p:cNvSpPr>
-            <a:spLocks noGrp="1"/>
-          </p:cNvSpPr>
-          <p:nvPr>
-            <p:ph type="body" sz="quarter" idx="12"/>
-          </p:nvPr>
-        </p:nvSpPr>
-        <p:spPr>
-          <a:xfrm>
-            <a:off x="5210818" y="2169000"/>
-            <a:ext cx="4500000" cy="2520000"/>
-          </a:xfrm>
-        </p:spPr>
-        <p:txBody>
-          <a:bodyPr rtlCol="0"/>
-          <a:lstStyle/>
-          <a:p>
-            <a:r>
-              <a:rPr lang="en-GB" b="1" dirty="0" err="1"/>
-              <a:t>Automatisation</a:t>
-            </a:r>
-            <a:r>
-              <a:rPr lang="en-GB" b="1" dirty="0"/>
-              <a:t> de </a:t>
-            </a:r>
-            <a:r>
-              <a:rPr lang="en-GB" b="1" dirty="0" err="1"/>
-              <a:t>l’audit</a:t>
-            </a:r>
-            <a:r>
-              <a:rPr lang="en-GB" b="1" dirty="0"/>
-              <a:t> de sécurité</a:t>
-            </a:r>
-          </a:p>
-          <a:p>
-            <a:r>
-              <a:rPr lang="en-GB" b="1" dirty="0" err="1"/>
-              <a:t>Création</a:t>
-            </a:r>
-            <a:r>
-              <a:rPr lang="en-GB" b="1" dirty="0"/>
-              <a:t> d’un script Python </a:t>
-            </a:r>
-            <a:r>
-              <a:rPr lang="en-GB" b="1" dirty="0" err="1"/>
-              <a:t>d’audit</a:t>
-            </a:r>
+            <a:r>
+              <a:rPr lang="en-GB" dirty="0" err="1"/>
+              <a:t>Durcissement</a:t>
+            </a:r>
+            <a:r>
+              <a:rPr lang="en-US" dirty="0"/>
+              <a:t> du </a:t>
+            </a:r>
+            <a:r>
+              <a:rPr lang="en-US" dirty="0" err="1"/>
+              <a:t>système</a:t>
+            </a:r>
+            <a:br>
+              <a:rPr lang="en-US" dirty="0"/>
+            </a:br>
             <a:endParaRPr lang="en-GB" dirty="0"/>
-          </a:p>
-          <a:p>
-            <a:r>
-              <a:rPr lang="en-GB" b="1" dirty="0" err="1"/>
-              <a:t>Vérification</a:t>
-            </a:r>
-            <a:r>
-              <a:rPr lang="en-GB" b="1" dirty="0"/>
-              <a:t> </a:t>
-            </a:r>
-            <a:r>
-              <a:rPr lang="en-GB" b="1" dirty="0" err="1"/>
-              <a:t>automatique</a:t>
-            </a:r>
-            <a:r>
-              <a:rPr lang="en-GB" b="1" dirty="0"/>
-              <a:t> de la configuration</a:t>
-            </a:r>
-            <a:endParaRPr lang="en-GB" dirty="0"/>
-          </a:p>
-          <a:p>
-            <a:r>
-              <a:rPr lang="en-GB" b="1" dirty="0" err="1"/>
-              <a:t>Contrôle</a:t>
-            </a:r>
-            <a:r>
-              <a:rPr lang="en-GB" b="1" dirty="0"/>
-              <a:t> des </a:t>
-            </a:r>
-            <a:r>
-              <a:rPr lang="en-GB" b="1" dirty="0" err="1"/>
-              <a:t>paramètres</a:t>
-            </a:r>
-            <a:r>
-              <a:rPr lang="en-GB" b="1" dirty="0"/>
-              <a:t> de sécurité</a:t>
-            </a:r>
-            <a:endParaRPr lang="en-GB" dirty="0"/>
-          </a:p>
-          <a:p>
-            <a:pPr lvl="1"/>
-            <a:r>
-              <a:rPr lang="en-GB" dirty="0" err="1"/>
-              <a:t>Comptes</a:t>
-            </a:r>
-            <a:r>
-              <a:rPr lang="en-GB" dirty="0"/>
-              <a:t> et permissions</a:t>
-            </a:r>
-          </a:p>
-          <a:p>
-            <a:pPr lvl="1"/>
-            <a:r>
-              <a:rPr lang="en-GB" dirty="0"/>
-              <a:t>Services </a:t>
-            </a:r>
-            <a:r>
-              <a:rPr lang="en-GB" dirty="0" err="1"/>
-              <a:t>actifs</a:t>
-            </a:r>
-            <a:endParaRPr lang="en-GB" dirty="0"/>
-          </a:p>
-          <a:p>
-            <a:pPr lvl="1"/>
-            <a:r>
-              <a:rPr lang="en-GB" dirty="0"/>
-              <a:t>Configuration SSH</a:t>
-            </a:r>
-          </a:p>
-          <a:p>
-            <a:pPr lvl="1"/>
-            <a:r>
-              <a:rPr lang="en-GB" dirty="0"/>
-              <a:t>Pare-feu</a:t>
-            </a:r>
           </a:p>
         </p:txBody>
       </p:sp>
     </p:spTree>
     <p:extLst>
       <p:ext uri="{BB962C8B-B14F-4D97-AF65-F5344CB8AC3E}">
-        <p14:creationId xmlns:p14="http://schemas.microsoft.com/office/powerpoint/2010/main" val="3188837873"/>
+        <p14:creationId xmlns:p14="http://schemas.microsoft.com/office/powerpoint/2010/main" val="1329746698"/>
       </p:ext>
     </p:extLst>
   </p:cSld>
@@ -10280,6 +9900,413 @@
       </p:grpSpPr>
       <p:pic>
         <p:nvPicPr>
+          <p:cNvPr id="9" name="Picture 8" descr="Top 5 Most Notorious Computer Hackers - TechEBlog">
+            <a:extLst>
+              <a:ext uri="{FF2B5EF4-FFF2-40B4-BE49-F238E27FC236}">
+                <a16:creationId xmlns:a16="http://schemas.microsoft.com/office/drawing/2014/main" id="{17F4F9DA-8794-924F-8E32-792B70B5B3F5}"/>
+              </a:ext>
+            </a:extLst>
+          </p:cNvPr>
+          <p:cNvPicPr>
+            <a:picLocks noChangeAspect="1"/>
+          </p:cNvPicPr>
+          <p:nvPr/>
+        </p:nvPicPr>
+        <p:blipFill>
+          <a:blip r:embed="rId3"/>
+          <a:stretch>
+            <a:fillRect/>
+          </a:stretch>
+        </p:blipFill>
+        <p:spPr>
+          <a:xfrm>
+            <a:off x="9989636" y="-19364"/>
+            <a:ext cx="2202363" cy="6877364"/>
+          </a:xfrm>
+          <a:prstGeom prst="rect">
+            <a:avLst/>
+          </a:prstGeom>
+        </p:spPr>
+      </p:pic>
+      <p:sp>
+        <p:nvSpPr>
+          <p:cNvPr id="2" name="Title 1">
+            <a:extLst>
+              <a:ext uri="{FF2B5EF4-FFF2-40B4-BE49-F238E27FC236}">
+                <a16:creationId xmlns:a16="http://schemas.microsoft.com/office/drawing/2014/main" id="{19304E83-A4F0-49C5-BB01-F5773509A2B3}"/>
+              </a:ext>
+            </a:extLst>
+          </p:cNvPr>
+          <p:cNvSpPr>
+            <a:spLocks noGrp="1"/>
+          </p:cNvSpPr>
+          <p:nvPr>
+            <p:ph type="title"/>
+          </p:nvPr>
+        </p:nvSpPr>
+        <p:spPr/>
+        <p:txBody>
+          <a:bodyPr rtlCol="0"/>
+          <a:lstStyle/>
+          <a:p>
+            <a:pPr rtl="0"/>
+            <a:r>
+              <a:rPr lang="fr-FR" dirty="0"/>
+              <a:t>S</a:t>
+            </a:r>
+            <a:r>
+              <a:rPr lang="en-GB" dirty="0"/>
+              <a:t>CRIPT PYTHON</a:t>
+            </a:r>
+          </a:p>
+        </p:txBody>
+      </p:sp>
+      <p:sp>
+        <p:nvSpPr>
+          <p:cNvPr id="5" name="Content Placeholder 4">
+            <a:extLst>
+              <a:ext uri="{FF2B5EF4-FFF2-40B4-BE49-F238E27FC236}">
+                <a16:creationId xmlns:a16="http://schemas.microsoft.com/office/drawing/2014/main" id="{CEEB3BAE-C0B2-447C-B8BE-96C6BD84D658}"/>
+              </a:ext>
+            </a:extLst>
+          </p:cNvPr>
+          <p:cNvSpPr>
+            <a:spLocks noGrp="1"/>
+          </p:cNvSpPr>
+          <p:nvPr>
+            <p:ph sz="half" idx="2"/>
+          </p:nvPr>
+        </p:nvSpPr>
+        <p:spPr>
+          <a:xfrm>
+            <a:off x="432000" y="2169000"/>
+            <a:ext cx="4500000" cy="2520000"/>
+          </a:xfrm>
+        </p:spPr>
+        <p:txBody>
+          <a:bodyPr rtlCol="0"/>
+          <a:lstStyle/>
+          <a:p>
+            <a:r>
+              <a:rPr lang="en-GB" b="1" dirty="0" err="1">
+                <a:solidFill>
+                  <a:schemeClr val="tx1"/>
+                </a:solidFill>
+              </a:rPr>
+              <a:t>Détection</a:t>
+            </a:r>
+            <a:r>
+              <a:rPr lang="en-GB" b="1" dirty="0">
+                <a:solidFill>
+                  <a:schemeClr val="tx1"/>
+                </a:solidFill>
+              </a:rPr>
+              <a:t> des anomalies</a:t>
+            </a:r>
+          </a:p>
+          <a:p>
+            <a:r>
+              <a:rPr lang="en-GB" b="1" dirty="0" err="1">
+                <a:solidFill>
+                  <a:schemeClr val="tx1"/>
+                </a:solidFill>
+              </a:rPr>
+              <a:t>Génération</a:t>
+            </a:r>
+            <a:r>
+              <a:rPr lang="en-GB" b="1" dirty="0">
+                <a:solidFill>
+                  <a:schemeClr val="tx1"/>
+                </a:solidFill>
+              </a:rPr>
+              <a:t> d’un état </a:t>
+            </a:r>
+            <a:r>
+              <a:rPr lang="en-GB" b="1" dirty="0" err="1">
+                <a:solidFill>
+                  <a:schemeClr val="tx1"/>
+                </a:solidFill>
+              </a:rPr>
+              <a:t>clair</a:t>
+            </a:r>
+            <a:r>
+              <a:rPr lang="en-GB" b="1" dirty="0">
+                <a:solidFill>
+                  <a:schemeClr val="tx1"/>
+                </a:solidFill>
+              </a:rPr>
+              <a:t> : </a:t>
+            </a:r>
+            <a:r>
+              <a:rPr lang="en-GB" b="1" dirty="0" err="1">
+                <a:solidFill>
+                  <a:schemeClr val="tx1"/>
+                </a:solidFill>
+              </a:rPr>
+              <a:t>conforme</a:t>
+            </a:r>
+            <a:r>
+              <a:rPr lang="en-GB" b="1" dirty="0">
+                <a:solidFill>
+                  <a:schemeClr val="tx1"/>
+                </a:solidFill>
+              </a:rPr>
+              <a:t> / non </a:t>
+            </a:r>
+            <a:r>
+              <a:rPr lang="en-GB" b="1" dirty="0" err="1">
+                <a:solidFill>
+                  <a:schemeClr val="tx1"/>
+                </a:solidFill>
+              </a:rPr>
+              <a:t>conforme</a:t>
+            </a:r>
+            <a:endParaRPr lang="en-GB" b="1" dirty="0">
+              <a:solidFill>
+                <a:schemeClr val="tx1"/>
+              </a:solidFill>
+            </a:endParaRPr>
+          </a:p>
+          <a:p>
+            <a:r>
+              <a:rPr lang="en-GB" b="1" dirty="0">
+                <a:solidFill>
+                  <a:schemeClr val="tx1"/>
+                </a:solidFill>
+              </a:rPr>
+              <a:t>Objectif : simplifier les </a:t>
+            </a:r>
+            <a:r>
+              <a:rPr lang="en-GB" b="1" dirty="0" err="1">
+                <a:solidFill>
+                  <a:schemeClr val="tx1"/>
+                </a:solidFill>
+              </a:rPr>
+              <a:t>vérifications</a:t>
+            </a:r>
+            <a:r>
+              <a:rPr lang="en-GB" b="1" dirty="0">
+                <a:solidFill>
+                  <a:schemeClr val="tx1"/>
+                </a:solidFill>
+              </a:rPr>
+              <a:t> et </a:t>
+            </a:r>
+            <a:r>
+              <a:rPr lang="en-GB" b="1" dirty="0" err="1">
+                <a:solidFill>
+                  <a:schemeClr val="tx1"/>
+                </a:solidFill>
+              </a:rPr>
+              <a:t>éviter</a:t>
+            </a:r>
+            <a:r>
+              <a:rPr lang="en-GB" b="1" dirty="0">
+                <a:solidFill>
+                  <a:schemeClr val="tx1"/>
+                </a:solidFill>
+              </a:rPr>
+              <a:t> les </a:t>
+            </a:r>
+            <a:r>
+              <a:rPr lang="en-GB" b="1" dirty="0" err="1">
+                <a:solidFill>
+                  <a:schemeClr val="tx1"/>
+                </a:solidFill>
+              </a:rPr>
+              <a:t>contrôles</a:t>
+            </a:r>
+            <a:r>
+              <a:rPr lang="en-GB" b="1" dirty="0">
+                <a:solidFill>
+                  <a:schemeClr val="tx1"/>
+                </a:solidFill>
+              </a:rPr>
+              <a:t> </a:t>
+            </a:r>
+            <a:r>
+              <a:rPr lang="en-GB" b="1" dirty="0" err="1">
+                <a:solidFill>
+                  <a:schemeClr val="tx1"/>
+                </a:solidFill>
+              </a:rPr>
+              <a:t>manuels</a:t>
+            </a:r>
+            <a:endParaRPr lang="en-GB" b="1" dirty="0">
+              <a:solidFill>
+                <a:schemeClr val="tx1"/>
+              </a:solidFill>
+            </a:endParaRPr>
+          </a:p>
+        </p:txBody>
+      </p:sp>
+      <p:sp>
+        <p:nvSpPr>
+          <p:cNvPr id="7" name="Text Placeholder 6">
+            <a:extLst>
+              <a:ext uri="{FF2B5EF4-FFF2-40B4-BE49-F238E27FC236}">
+                <a16:creationId xmlns:a16="http://schemas.microsoft.com/office/drawing/2014/main" id="{26A87885-D672-4CF9-A78D-CFE98385B03A}"/>
+              </a:ext>
+            </a:extLst>
+          </p:cNvPr>
+          <p:cNvSpPr>
+            <a:spLocks noGrp="1"/>
+          </p:cNvSpPr>
+          <p:nvPr>
+            <p:ph type="body" sz="quarter" idx="12"/>
+          </p:nvPr>
+        </p:nvSpPr>
+        <p:spPr>
+          <a:xfrm>
+            <a:off x="5210818" y="2169000"/>
+            <a:ext cx="4500000" cy="2520000"/>
+          </a:xfrm>
+        </p:spPr>
+        <p:txBody>
+          <a:bodyPr rtlCol="0"/>
+          <a:lstStyle/>
+          <a:p>
+            <a:r>
+              <a:rPr lang="en-GB" b="1" dirty="0" err="1"/>
+              <a:t>Automatisation</a:t>
+            </a:r>
+            <a:r>
+              <a:rPr lang="en-GB" b="1" dirty="0"/>
+              <a:t> de </a:t>
+            </a:r>
+            <a:r>
+              <a:rPr lang="en-GB" b="1" dirty="0" err="1"/>
+              <a:t>l’audit</a:t>
+            </a:r>
+            <a:r>
+              <a:rPr lang="en-GB" b="1" dirty="0"/>
+              <a:t> de sécurité</a:t>
+            </a:r>
+          </a:p>
+          <a:p>
+            <a:r>
+              <a:rPr lang="en-GB" b="1" dirty="0" err="1"/>
+              <a:t>Création</a:t>
+            </a:r>
+            <a:r>
+              <a:rPr lang="en-GB" b="1" dirty="0"/>
+              <a:t> d’un script Python </a:t>
+            </a:r>
+            <a:r>
+              <a:rPr lang="en-GB" b="1" dirty="0" err="1"/>
+              <a:t>d’audit</a:t>
+            </a:r>
+            <a:endParaRPr lang="en-GB" dirty="0"/>
+          </a:p>
+          <a:p>
+            <a:r>
+              <a:rPr lang="en-GB" b="1" dirty="0" err="1"/>
+              <a:t>Vérification</a:t>
+            </a:r>
+            <a:r>
+              <a:rPr lang="en-GB" b="1" dirty="0"/>
+              <a:t> </a:t>
+            </a:r>
+            <a:r>
+              <a:rPr lang="en-GB" b="1" dirty="0" err="1"/>
+              <a:t>automatique</a:t>
+            </a:r>
+            <a:r>
+              <a:rPr lang="en-GB" b="1" dirty="0"/>
+              <a:t> de la configuration</a:t>
+            </a:r>
+            <a:endParaRPr lang="en-GB" dirty="0"/>
+          </a:p>
+          <a:p>
+            <a:r>
+              <a:rPr lang="en-GB" b="1" dirty="0" err="1"/>
+              <a:t>Contrôle</a:t>
+            </a:r>
+            <a:r>
+              <a:rPr lang="en-GB" b="1" dirty="0"/>
+              <a:t> des </a:t>
+            </a:r>
+            <a:r>
+              <a:rPr lang="en-GB" b="1" dirty="0" err="1"/>
+              <a:t>paramètres</a:t>
+            </a:r>
+            <a:r>
+              <a:rPr lang="en-GB" b="1" dirty="0"/>
+              <a:t> de sécurité</a:t>
+            </a:r>
+            <a:endParaRPr lang="en-GB" dirty="0"/>
+          </a:p>
+          <a:p>
+            <a:pPr lvl="1"/>
+            <a:r>
+              <a:rPr lang="en-GB" dirty="0" err="1"/>
+              <a:t>Comptes</a:t>
+            </a:r>
+            <a:r>
+              <a:rPr lang="en-GB" dirty="0"/>
+              <a:t> et permissions</a:t>
+            </a:r>
+          </a:p>
+          <a:p>
+            <a:pPr lvl="1"/>
+            <a:r>
+              <a:rPr lang="en-GB" dirty="0"/>
+              <a:t>Services </a:t>
+            </a:r>
+            <a:r>
+              <a:rPr lang="en-GB" dirty="0" err="1"/>
+              <a:t>actifs</a:t>
+            </a:r>
+            <a:endParaRPr lang="en-GB" dirty="0"/>
+          </a:p>
+          <a:p>
+            <a:pPr lvl="1"/>
+            <a:r>
+              <a:rPr lang="en-GB" dirty="0"/>
+              <a:t>Configuration SSH</a:t>
+            </a:r>
+          </a:p>
+          <a:p>
+            <a:pPr lvl="1"/>
+            <a:r>
+              <a:rPr lang="en-GB" dirty="0"/>
+              <a:t>Pare-feu</a:t>
+            </a:r>
+          </a:p>
+        </p:txBody>
+      </p:sp>
+    </p:spTree>
+    <p:extLst>
+      <p:ext uri="{BB962C8B-B14F-4D97-AF65-F5344CB8AC3E}">
+        <p14:creationId xmlns:p14="http://schemas.microsoft.com/office/powerpoint/2010/main" val="3188837873"/>
+      </p:ext>
+    </p:extLst>
+  </p:cSld>
+  <p:clrMapOvr>
+    <a:masterClrMapping/>
+  </p:clrMapOvr>
+</p:sld>
+</file>
+
+<file path=ppt/slides/slide8.xml><?xml version="1.0" encoding="utf-8"?>
+<p:sld xmlns:a="http://schemas.openxmlformats.org/drawingml/2006/main" xmlns:r="http://schemas.openxmlformats.org/officeDocument/2006/relationships" xmlns:p="http://schemas.openxmlformats.org/presentationml/2006/main">
+  <p:cSld>
+    <p:spTree>
+      <p:nvGrpSpPr>
+        <p:cNvPr id="1" name=""/>
+        <p:cNvGrpSpPr/>
+        <p:nvPr/>
+      </p:nvGrpSpPr>
+      <p:grpSpPr>
+        <a:xfrm>
+          <a:off x="0" y="0"/>
+          <a:ext cx="0" cy="0"/>
+          <a:chOff x="0" y="0"/>
+          <a:chExt cx="0" cy="0"/>
+        </a:xfrm>
+      </p:grpSpPr>
+      <p:pic>
+        <p:nvPicPr>
           <p:cNvPr id="2" name="Picture 1" descr="2,493 Hacker Code High Res Illustrations - Getty Images | Cyber security,  Big data, Computer code">
             <a:extLst>
               <a:ext uri="{FF2B5EF4-FFF2-40B4-BE49-F238E27FC236}">
@@ -10625,7 +10652,7 @@
 </p:sld>
 </file>
 
-<file path=ppt/slides/slide8.xml><?xml version="1.0" encoding="utf-8"?>
+<file path=ppt/slides/slide9.xml><?xml version="1.0" encoding="utf-8"?>
 <p:sld xmlns:a="http://schemas.openxmlformats.org/drawingml/2006/main" xmlns:r="http://schemas.openxmlformats.org/officeDocument/2006/relationships" xmlns:p="http://schemas.openxmlformats.org/presentationml/2006/main">
   <p:cSld>
     <p:spTree>
@@ -11639,20 +11666,20 @@
 </file>
 
 <file path=customXml/item1.xml><?xml version="1.0" encoding="utf-8"?>
+<p:properties xmlns:p="http://schemas.microsoft.com/office/2006/metadata/properties" xmlns:xsi="http://www.w3.org/2001/XMLSchema-instance" xmlns:pc="http://schemas.microsoft.com/office/infopath/2007/PartnerControls">
+  <documentManagement>
+    <_activity xmlns="fd0cbe9c-acd0-4269-b726-4bce2dd7b032" xsi:nil="true"/>
+  </documentManagement>
+</p:properties>
+</file>
+
+<file path=customXml/item2.xml><?xml version="1.0" encoding="utf-8"?>
 <?mso-contentType ?>
 <FormTemplates xmlns="http://schemas.microsoft.com/sharepoint/v3/contenttype/forms">
   <Display>DocumentLibraryForm</Display>
   <Edit>DocumentLibraryForm</Edit>
   <New>DocumentLibraryForm</New>
 </FormTemplates>
-</file>
-
-<file path=customXml/item2.xml><?xml version="1.0" encoding="utf-8"?>
-<p:properties xmlns:p="http://schemas.microsoft.com/office/2006/metadata/properties" xmlns:xsi="http://www.w3.org/2001/XMLSchema-instance" xmlns:pc="http://schemas.microsoft.com/office/infopath/2007/PartnerControls">
-  <documentManagement>
-    <_activity xmlns="fd0cbe9c-acd0-4269-b726-4bce2dd7b032" xsi:nil="true"/>
-  </documentManagement>
-</p:properties>
 </file>
 
 <file path=customXml/item3.xml><?xml version="1.0" encoding="utf-8"?>
@@ -11832,14 +11859,6 @@
 </file>
 
 <file path=customXml/itemProps1.xml><?xml version="1.0" encoding="utf-8"?>
-<ds:datastoreItem xmlns:ds="http://schemas.openxmlformats.org/officeDocument/2006/customXml" ds:itemID="{F6CB1848-D3E0-4F10-B640-720BE758B85B}">
-  <ds:schemaRefs>
-    <ds:schemaRef ds:uri="http://schemas.microsoft.com/sharepoint/v3/contenttype/forms"/>
-  </ds:schemaRefs>
-</ds:datastoreItem>
-</file>
-
-<file path=customXml/itemProps2.xml><?xml version="1.0" encoding="utf-8"?>
 <ds:datastoreItem xmlns:ds="http://schemas.openxmlformats.org/officeDocument/2006/customXml" ds:itemID="{E4934E25-8442-49E9-ABDF-3146C4145F3B}">
   <ds:schemaRefs>
     <ds:schemaRef ds:uri="http://purl.org/dc/dcmitype/"/>
@@ -11851,6 +11870,14 @@
     <ds:schemaRef ds:uri="http://schemas.microsoft.com/office/infopath/2007/PartnerControls"/>
     <ds:schemaRef ds:uri="http://purl.org/dc/terms/"/>
     <ds:schemaRef ds:uri="http://purl.org/dc/elements/1.1/"/>
+  </ds:schemaRefs>
+</ds:datastoreItem>
+</file>
+
+<file path=customXml/itemProps2.xml><?xml version="1.0" encoding="utf-8"?>
+<ds:datastoreItem xmlns:ds="http://schemas.openxmlformats.org/officeDocument/2006/customXml" ds:itemID="{F6CB1848-D3E0-4F10-B640-720BE758B85B}">
+  <ds:schemaRefs>
+    <ds:schemaRef ds:uri="http://schemas.microsoft.com/sharepoint/v3/contenttype/forms"/>
   </ds:schemaRefs>
 </ds:datastoreItem>
 </file>
